--- a/output_pptx/Seek_Ye_First.pptx
+++ b/output_pptx/Seek_Ye_First.pptx
@@ -3108,8 +3108,8 @@
         </p:nvSpPr>
         <p:spPr>
           <a:xfrm>
-            <a:off x="594360" y="2258568"/>
-            <a:ext cx="11002975" cy="685800"/>
+            <a:off x="640080" y="2052828"/>
+            <a:ext cx="10911535" cy="731520"/>
           </a:xfrm>
           <a:prstGeom prst="rect">
             <a:avLst/>
@@ -3124,7 +3124,7 @@
           <a:p>
             <a:pPr algn="ctr"/>
             <a:r>
-              <a:rPr sz="4400" b="1" i="0">
+              <a:rPr sz="4800" b="1" i="0">
                 <a:solidFill>
                   <a:srgbClr val="FFFFFF"/>
                 </a:solidFill>
@@ -3143,8 +3143,8 @@
         </p:nvSpPr>
         <p:spPr>
           <a:xfrm>
-            <a:off x="594360" y="2980944"/>
-            <a:ext cx="11002975" cy="347472"/>
+            <a:off x="640080" y="2985516"/>
+            <a:ext cx="10911535" cy="731520"/>
           </a:xfrm>
           <a:prstGeom prst="rect">
             <a:avLst/>
@@ -3159,83 +3159,13 @@
           <a:p>
             <a:pPr algn="ctr"/>
             <a:r>
-              <a:rPr sz="2200" b="0" i="1">
-                <a:solidFill>
-                  <a:srgbClr val="8C8C8C"/>
-                </a:solidFill>
-                <a:latin typeface="Arial"/>
-              </a:rPr>
-              <a:t/>
-            </a:r>
-          </a:p>
-        </p:txBody>
-      </p:sp>
-      <p:sp>
-        <p:nvSpPr>
-          <p:cNvPr id="4" name="TextBox 3"/>
-          <p:cNvSpPr txBox="1"/>
-          <p:nvPr/>
-        </p:nvSpPr>
-        <p:spPr>
-          <a:xfrm>
-            <a:off x="594360" y="3529584"/>
-            <a:ext cx="11002975" cy="685800"/>
-          </a:xfrm>
-          <a:prstGeom prst="rect">
-            <a:avLst/>
-          </a:prstGeom>
-          <a:noFill/>
-        </p:spPr>
-        <p:txBody>
-          <a:bodyPr wrap="square">
-            <a:spAutoFit/>
-          </a:bodyPr>
-          <a:lstStyle/>
-          <a:p>
-            <a:pPr algn="ctr"/>
-            <a:r>
-              <a:rPr sz="4400" b="1" i="0">
+              <a:rPr sz="4800" b="1" i="0">
                 <a:solidFill>
                   <a:srgbClr val="FFFFFF"/>
                 </a:solidFill>
                 <a:latin typeface="Arial"/>
               </a:rPr>
               <a:t>Buscai primeiro o reino de Deus</a:t>
-            </a:r>
-          </a:p>
-        </p:txBody>
-      </p:sp>
-      <p:sp>
-        <p:nvSpPr>
-          <p:cNvPr id="5" name="TextBox 4"/>
-          <p:cNvSpPr txBox="1"/>
-          <p:nvPr/>
-        </p:nvSpPr>
-        <p:spPr>
-          <a:xfrm>
-            <a:off x="594360" y="4251960"/>
-            <a:ext cx="11002975" cy="347472"/>
-          </a:xfrm>
-          <a:prstGeom prst="rect">
-            <a:avLst/>
-          </a:prstGeom>
-          <a:noFill/>
-        </p:spPr>
-        <p:txBody>
-          <a:bodyPr wrap="square">
-            <a:spAutoFit/>
-          </a:bodyPr>
-          <a:lstStyle/>
-          <a:p>
-            <a:pPr algn="ctr"/>
-            <a:r>
-              <a:rPr sz="2200" b="0" i="1">
-                <a:solidFill>
-                  <a:srgbClr val="8C8C8C"/>
-                </a:solidFill>
-                <a:latin typeface="Arial"/>
-              </a:rPr>
-              <a:t/>
             </a:r>
           </a:p>
         </p:txBody>
@@ -3274,8 +3204,8 @@
         </p:nvSpPr>
         <p:spPr>
           <a:xfrm>
-            <a:off x="594360" y="2258568"/>
-            <a:ext cx="11002975" cy="685800"/>
+            <a:off x="640080" y="2052828"/>
+            <a:ext cx="10911535" cy="731520"/>
           </a:xfrm>
           <a:prstGeom prst="rect">
             <a:avLst/>
@@ -3290,7 +3220,7 @@
           <a:p>
             <a:pPr algn="ctr"/>
             <a:r>
-              <a:rPr sz="4400" b="1" i="0">
+              <a:rPr sz="4800" b="1" i="0">
                 <a:solidFill>
                   <a:srgbClr val="FFFFFF"/>
                 </a:solidFill>
@@ -3309,8 +3239,8 @@
         </p:nvSpPr>
         <p:spPr>
           <a:xfrm>
-            <a:off x="594360" y="2980944"/>
-            <a:ext cx="11002975" cy="347472"/>
+            <a:off x="640080" y="2985516"/>
+            <a:ext cx="10911535" cy="731520"/>
           </a:xfrm>
           <a:prstGeom prst="rect">
             <a:avLst/>
@@ -3325,83 +3255,13 @@
           <a:p>
             <a:pPr algn="ctr"/>
             <a:r>
-              <a:rPr sz="2200" b="0" i="1">
-                <a:solidFill>
-                  <a:srgbClr val="8C8C8C"/>
-                </a:solidFill>
-                <a:latin typeface="Arial"/>
-              </a:rPr>
-              <a:t/>
-            </a:r>
-          </a:p>
-        </p:txBody>
-      </p:sp>
-      <p:sp>
-        <p:nvSpPr>
-          <p:cNvPr id="4" name="TextBox 3"/>
-          <p:cNvSpPr txBox="1"/>
-          <p:nvPr/>
-        </p:nvSpPr>
-        <p:spPr>
-          <a:xfrm>
-            <a:off x="594360" y="3529584"/>
-            <a:ext cx="11002975" cy="685800"/>
-          </a:xfrm>
-          <a:prstGeom prst="rect">
-            <a:avLst/>
-          </a:prstGeom>
-          <a:noFill/>
-        </p:spPr>
-        <p:txBody>
-          <a:bodyPr wrap="square">
-            <a:spAutoFit/>
-          </a:bodyPr>
-          <a:lstStyle/>
-          <a:p>
-            <a:pPr algn="ctr"/>
-            <a:r>
-              <a:rPr sz="4400" b="1" i="0">
+              <a:rPr sz="4800" b="1" i="0">
                 <a:solidFill>
                   <a:srgbClr val="FFFFFF"/>
                 </a:solidFill>
                 <a:latin typeface="Arial"/>
               </a:rPr>
               <a:t>E todas estas coisas</a:t>
-            </a:r>
-          </a:p>
-        </p:txBody>
-      </p:sp>
-      <p:sp>
-        <p:nvSpPr>
-          <p:cNvPr id="5" name="TextBox 4"/>
-          <p:cNvSpPr txBox="1"/>
-          <p:nvPr/>
-        </p:nvSpPr>
-        <p:spPr>
-          <a:xfrm>
-            <a:off x="594360" y="4251960"/>
-            <a:ext cx="11002975" cy="347472"/>
-          </a:xfrm>
-          <a:prstGeom prst="rect">
-            <a:avLst/>
-          </a:prstGeom>
-          <a:noFill/>
-        </p:spPr>
-        <p:txBody>
-          <a:bodyPr wrap="square">
-            <a:spAutoFit/>
-          </a:bodyPr>
-          <a:lstStyle/>
-          <a:p>
-            <a:pPr algn="ctr"/>
-            <a:r>
-              <a:rPr sz="2200" b="0" i="1">
-                <a:solidFill>
-                  <a:srgbClr val="8C8C8C"/>
-                </a:solidFill>
-                <a:latin typeface="Arial"/>
-              </a:rPr>
-              <a:t/>
             </a:r>
           </a:p>
         </p:txBody>
@@ -3440,8 +3300,8 @@
         </p:nvSpPr>
         <p:spPr>
           <a:xfrm>
-            <a:off x="594360" y="1837944"/>
-            <a:ext cx="11002975" cy="685800"/>
+            <a:off x="640080" y="1650492"/>
+            <a:ext cx="10911535" cy="731520"/>
           </a:xfrm>
           <a:prstGeom prst="rect">
             <a:avLst/>
@@ -3456,7 +3316,7 @@
           <a:p>
             <a:pPr algn="ctr"/>
             <a:r>
-              <a:rPr sz="4400" b="1" i="0">
+              <a:rPr sz="4800" b="1" i="0">
                 <a:solidFill>
                   <a:srgbClr val="FFFFFF"/>
                 </a:solidFill>
@@ -3475,8 +3335,8 @@
         </p:nvSpPr>
         <p:spPr>
           <a:xfrm>
-            <a:off x="594360" y="2560320"/>
-            <a:ext cx="11002975" cy="384048"/>
+            <a:off x="640080" y="2418588"/>
+            <a:ext cx="10911535" cy="365760"/>
           </a:xfrm>
           <a:prstGeom prst="rect">
             <a:avLst/>
@@ -3491,9 +3351,9 @@
           <a:p>
             <a:pPr algn="ctr"/>
             <a:r>
-              <a:rPr sz="2191" b="0" i="1">
+              <a:rPr sz="2400" b="0" i="1">
                 <a:solidFill>
-                  <a:srgbClr val="B4B4B4"/>
+                  <a:srgbClr val="AAAAAA"/>
                 </a:solidFill>
                 <a:latin typeface="Arial"/>
               </a:rPr>
@@ -3510,8 +3370,8 @@
         </p:nvSpPr>
         <p:spPr>
           <a:xfrm>
-            <a:off x="594360" y="2980944"/>
-            <a:ext cx="11002975" cy="347472"/>
+            <a:off x="640080" y="2985516"/>
+            <a:ext cx="10911535" cy="731520"/>
           </a:xfrm>
           <a:prstGeom prst="rect">
             <a:avLst/>
@@ -3526,13 +3386,13 @@
           <a:p>
             <a:pPr algn="ctr"/>
             <a:r>
-              <a:rPr sz="2000" b="0" i="1">
+              <a:rPr sz="4800" b="1" i="0">
                 <a:solidFill>
-                  <a:srgbClr val="8C8C8C"/>
+                  <a:srgbClr val="FFFFFF"/>
                 </a:solidFill>
                 <a:latin typeface="Arial"/>
               </a:rPr>
-              <a:t/>
+              <a:t>そうすればみな与えられる　ハレル　ハレルヤ</a:t>
             </a:r>
           </a:p>
         </p:txBody>
@@ -3545,8 +3405,8 @@
         </p:nvSpPr>
         <p:spPr>
           <a:xfrm>
-            <a:off x="594360" y="3529584"/>
-            <a:ext cx="11002975" cy="685800"/>
+            <a:off x="640080" y="3753612"/>
+            <a:ext cx="10911535" cy="365760"/>
           </a:xfrm>
           <a:prstGeom prst="rect">
             <a:avLst/>
@@ -3561,13 +3421,13 @@
           <a:p>
             <a:pPr algn="ctr"/>
             <a:r>
-              <a:rPr sz="4400" b="1" i="0">
+              <a:rPr sz="2400" b="0" i="1">
                 <a:solidFill>
-                  <a:srgbClr val="FFFFFF"/>
+                  <a:srgbClr val="AAAAAA"/>
                 </a:solidFill>
                 <a:latin typeface="Arial"/>
               </a:rPr>
-              <a:t>そうすればみな与えられる　ハレル　ハレルヤ</a:t>
+              <a:t>Sousureba mina ataerareru hareru hareruya</a:t>
             </a:r>
           </a:p>
         </p:txBody>
@@ -3580,8 +3440,8 @@
         </p:nvSpPr>
         <p:spPr>
           <a:xfrm>
-            <a:off x="594360" y="4251960"/>
-            <a:ext cx="11002975" cy="384048"/>
+            <a:off x="640080" y="4530852"/>
+            <a:ext cx="10911535" cy="310896"/>
           </a:xfrm>
           <a:prstGeom prst="rect">
             <a:avLst/>
@@ -3596,13 +3456,13 @@
           <a:p>
             <a:pPr algn="ctr"/>
             <a:r>
-              <a:rPr sz="2400" b="0" i="1">
+              <a:rPr sz="2000" b="0" i="1">
                 <a:solidFill>
-                  <a:srgbClr val="B4B4B4"/>
+                  <a:srgbClr val="828282"/>
                 </a:solidFill>
                 <a:latin typeface="Arial"/>
               </a:rPr>
-              <a:t>Sousureba mina ataerareru hareru hareruya</a:t>
+              <a:t>Buscai Primeiro</a:t>
             </a:r>
           </a:p>
         </p:txBody>
@@ -3615,8 +3475,8 @@
         </p:nvSpPr>
         <p:spPr>
           <a:xfrm>
-            <a:off x="594360" y="4672584"/>
-            <a:ext cx="11002975" cy="347472"/>
+            <a:off x="640080" y="4896612"/>
+            <a:ext cx="10911535" cy="310896"/>
           </a:xfrm>
           <a:prstGeom prst="rect">
             <a:avLst/>
@@ -3633,11 +3493,11 @@
             <a:r>
               <a:rPr sz="2000" b="0" i="1">
                 <a:solidFill>
-                  <a:srgbClr val="8C8C8C"/>
+                  <a:srgbClr val="828282"/>
                 </a:solidFill>
                 <a:latin typeface="Arial"/>
               </a:rPr>
-              <a:t/>
+              <a:t>Buscai primeiro o reino de Deus</a:t>
             </a:r>
           </a:p>
         </p:txBody>
@@ -3676,8 +3536,8 @@
         </p:nvSpPr>
         <p:spPr>
           <a:xfrm>
-            <a:off x="594360" y="2258568"/>
-            <a:ext cx="11002975" cy="685800"/>
+            <a:off x="640080" y="2052828"/>
+            <a:ext cx="10911535" cy="731520"/>
           </a:xfrm>
           <a:prstGeom prst="rect">
             <a:avLst/>
@@ -3692,7 +3552,7 @@
           <a:p>
             <a:pPr algn="ctr"/>
             <a:r>
-              <a:rPr sz="4400" b="1" i="0">
+              <a:rPr sz="4800" b="1" i="0">
                 <a:solidFill>
                   <a:srgbClr val="FFFFFF"/>
                 </a:solidFill>
@@ -3711,8 +3571,8 @@
         </p:nvSpPr>
         <p:spPr>
           <a:xfrm>
-            <a:off x="594360" y="2980944"/>
-            <a:ext cx="11002975" cy="347472"/>
+            <a:off x="640080" y="2985516"/>
+            <a:ext cx="10911535" cy="731520"/>
           </a:xfrm>
           <a:prstGeom prst="rect">
             <a:avLst/>
@@ -3727,83 +3587,13 @@
           <a:p>
             <a:pPr algn="ctr"/>
             <a:r>
-              <a:rPr sz="2200" b="0" i="1">
-                <a:solidFill>
-                  <a:srgbClr val="8C8C8C"/>
-                </a:solidFill>
-                <a:latin typeface="Arial"/>
-              </a:rPr>
-              <a:t/>
-            </a:r>
-          </a:p>
-        </p:txBody>
-      </p:sp>
-      <p:sp>
-        <p:nvSpPr>
-          <p:cNvPr id="4" name="TextBox 3"/>
-          <p:cNvSpPr txBox="1"/>
-          <p:nvPr/>
-        </p:nvSpPr>
-        <p:spPr>
-          <a:xfrm>
-            <a:off x="594360" y="3529584"/>
-            <a:ext cx="11002975" cy="685800"/>
-          </a:xfrm>
-          <a:prstGeom prst="rect">
-            <a:avLst/>
-          </a:prstGeom>
-          <a:noFill/>
-        </p:spPr>
-        <p:txBody>
-          <a:bodyPr wrap="square">
-            <a:spAutoFit/>
-          </a:bodyPr>
-          <a:lstStyle/>
-          <a:p>
-            <a:pPr algn="ctr"/>
-            <a:r>
-              <a:rPr sz="4400" b="1" i="0">
+              <a:rPr sz="4800" b="1" i="0">
                 <a:solidFill>
                   <a:srgbClr val="FFFFFF"/>
                 </a:solidFill>
                 <a:latin typeface="Arial"/>
               </a:rPr>
               <a:t>Aleluia, Aleluia</a:t>
-            </a:r>
-          </a:p>
-        </p:txBody>
-      </p:sp>
-      <p:sp>
-        <p:nvSpPr>
-          <p:cNvPr id="5" name="TextBox 4"/>
-          <p:cNvSpPr txBox="1"/>
-          <p:nvPr/>
-        </p:nvSpPr>
-        <p:spPr>
-          <a:xfrm>
-            <a:off x="594360" y="4251960"/>
-            <a:ext cx="11002975" cy="347472"/>
-          </a:xfrm>
-          <a:prstGeom prst="rect">
-            <a:avLst/>
-          </a:prstGeom>
-          <a:noFill/>
-        </p:spPr>
-        <p:txBody>
-          <a:bodyPr wrap="square">
-            <a:spAutoFit/>
-          </a:bodyPr>
-          <a:lstStyle/>
-          <a:p>
-            <a:pPr algn="ctr"/>
-            <a:r>
-              <a:rPr sz="2200" b="0" i="1">
-                <a:solidFill>
-                  <a:srgbClr val="8C8C8C"/>
-                </a:solidFill>
-                <a:latin typeface="Arial"/>
-              </a:rPr>
-              <a:t/>
             </a:r>
           </a:p>
         </p:txBody>
@@ -3842,8 +3632,8 @@
         </p:nvSpPr>
         <p:spPr>
           <a:xfrm>
-            <a:off x="594360" y="2258568"/>
-            <a:ext cx="11002975" cy="685800"/>
+            <a:off x="640080" y="2052828"/>
+            <a:ext cx="10911535" cy="731520"/>
           </a:xfrm>
           <a:prstGeom prst="rect">
             <a:avLst/>
@@ -3858,7 +3648,7 @@
           <a:p>
             <a:pPr algn="ctr"/>
             <a:r>
-              <a:rPr sz="4400" b="1" i="0">
+              <a:rPr sz="4800" b="1" i="0">
                 <a:solidFill>
                   <a:srgbClr val="FFFFFF"/>
                 </a:solidFill>
@@ -3877,8 +3667,8 @@
         </p:nvSpPr>
         <p:spPr>
           <a:xfrm>
-            <a:off x="594360" y="2980944"/>
-            <a:ext cx="11002975" cy="347472"/>
+            <a:off x="640080" y="2985516"/>
+            <a:ext cx="10911535" cy="731520"/>
           </a:xfrm>
           <a:prstGeom prst="rect">
             <a:avLst/>
@@ -3893,83 +3683,13 @@
           <a:p>
             <a:pPr algn="ctr"/>
             <a:r>
-              <a:rPr sz="2200" b="0" i="1">
-                <a:solidFill>
-                  <a:srgbClr val="8C8C8C"/>
-                </a:solidFill>
-                <a:latin typeface="Arial"/>
-              </a:rPr>
-              <a:t/>
-            </a:r>
-          </a:p>
-        </p:txBody>
-      </p:sp>
-      <p:sp>
-        <p:nvSpPr>
-          <p:cNvPr id="4" name="TextBox 3"/>
-          <p:cNvSpPr txBox="1"/>
-          <p:nvPr/>
-        </p:nvSpPr>
-        <p:spPr>
-          <a:xfrm>
-            <a:off x="594360" y="3529584"/>
-            <a:ext cx="11002975" cy="685800"/>
-          </a:xfrm>
-          <a:prstGeom prst="rect">
-            <a:avLst/>
-          </a:prstGeom>
-          <a:noFill/>
-        </p:spPr>
-        <p:txBody>
-          <a:bodyPr wrap="square">
-            <a:spAutoFit/>
-          </a:bodyPr>
-          <a:lstStyle/>
-          <a:p>
-            <a:pPr algn="ctr"/>
-            <a:r>
-              <a:rPr sz="4400" b="1" i="0">
+              <a:rPr sz="4800" b="1" i="0">
                 <a:solidFill>
                   <a:srgbClr val="FFFFFF"/>
                 </a:solidFill>
                 <a:latin typeface="Arial"/>
               </a:rPr>
               <a:t>Buscai e achareis</a:t>
-            </a:r>
-          </a:p>
-        </p:txBody>
-      </p:sp>
-      <p:sp>
-        <p:nvSpPr>
-          <p:cNvPr id="5" name="TextBox 4"/>
-          <p:cNvSpPr txBox="1"/>
-          <p:nvPr/>
-        </p:nvSpPr>
-        <p:spPr>
-          <a:xfrm>
-            <a:off x="594360" y="4251960"/>
-            <a:ext cx="11002975" cy="347472"/>
-          </a:xfrm>
-          <a:prstGeom prst="rect">
-            <a:avLst/>
-          </a:prstGeom>
-          <a:noFill/>
-        </p:spPr>
-        <p:txBody>
-          <a:bodyPr wrap="square">
-            <a:spAutoFit/>
-          </a:bodyPr>
-          <a:lstStyle/>
-          <a:p>
-            <a:pPr algn="ctr"/>
-            <a:r>
-              <a:rPr sz="2200" b="0" i="1">
-                <a:solidFill>
-                  <a:srgbClr val="8C8C8C"/>
-                </a:solidFill>
-                <a:latin typeface="Arial"/>
-              </a:rPr>
-              <a:t/>
             </a:r>
           </a:p>
         </p:txBody>

--- a/output_pptx/Seek_Ye_First.pptx
+++ b/output_pptx/Seek_Ye_First.pptx
@@ -3170,6 +3170,76 @@
           </a:p>
         </p:txBody>
       </p:sp>
+      <p:sp>
+        <p:nvSpPr>
+          <p:cNvPr id="4" name="TextBox 3"/>
+          <p:cNvSpPr txBox="1"/>
+          <p:nvPr/>
+        </p:nvSpPr>
+        <p:spPr>
+          <a:xfrm>
+            <a:off x="640080" y="4128516"/>
+            <a:ext cx="10911535" cy="310896"/>
+          </a:xfrm>
+          <a:prstGeom prst="rect">
+            <a:avLst/>
+          </a:prstGeom>
+          <a:noFill/>
+        </p:spPr>
+        <p:txBody>
+          <a:bodyPr wrap="square">
+            <a:spAutoFit/>
+          </a:bodyPr>
+          <a:lstStyle/>
+          <a:p>
+            <a:pPr algn="ctr"/>
+            <a:r>
+              <a:rPr sz="2000" b="0" i="0">
+                <a:solidFill>
+                  <a:srgbClr val="828282"/>
+                </a:solidFill>
+                <a:latin typeface="Arial"/>
+              </a:rPr>
+              <a:t>まず第一に求めよ</a:t>
+            </a:r>
+          </a:p>
+        </p:txBody>
+      </p:sp>
+      <p:sp>
+        <p:nvSpPr>
+          <p:cNvPr id="5" name="TextBox 4"/>
+          <p:cNvSpPr txBox="1"/>
+          <p:nvPr/>
+        </p:nvSpPr>
+        <p:spPr>
+          <a:xfrm>
+            <a:off x="640080" y="4494276"/>
+            <a:ext cx="10911535" cy="310896"/>
+          </a:xfrm>
+          <a:prstGeom prst="rect">
+            <a:avLst/>
+          </a:prstGeom>
+          <a:noFill/>
+        </p:spPr>
+        <p:txBody>
+          <a:bodyPr wrap="square">
+            <a:spAutoFit/>
+          </a:bodyPr>
+          <a:lstStyle/>
+          <a:p>
+            <a:pPr algn="ctr"/>
+            <a:r>
+              <a:rPr sz="2000" b="0" i="0">
+                <a:solidFill>
+                  <a:srgbClr val="828282"/>
+                </a:solidFill>
+                <a:latin typeface="Arial"/>
+              </a:rPr>
+              <a:t>まず神の国を求めよ</a:t>
+            </a:r>
+          </a:p>
+        </p:txBody>
+      </p:sp>
     </p:spTree>
   </p:cSld>
   <p:clrMapOvr>
@@ -3266,6 +3336,76 @@
           </a:p>
         </p:txBody>
       </p:sp>
+      <p:sp>
+        <p:nvSpPr>
+          <p:cNvPr id="4" name="TextBox 3"/>
+          <p:cNvSpPr txBox="1"/>
+          <p:nvPr/>
+        </p:nvSpPr>
+        <p:spPr>
+          <a:xfrm>
+            <a:off x="640080" y="4128516"/>
+            <a:ext cx="10911535" cy="310896"/>
+          </a:xfrm>
+          <a:prstGeom prst="rect">
+            <a:avLst/>
+          </a:prstGeom>
+          <a:noFill/>
+        </p:spPr>
+        <p:txBody>
+          <a:bodyPr wrap="square">
+            <a:spAutoFit/>
+          </a:bodyPr>
+          <a:lstStyle/>
+          <a:p>
+            <a:pPr algn="ctr"/>
+            <a:r>
+              <a:rPr sz="2000" b="0" i="0">
+                <a:solidFill>
+                  <a:srgbClr val="828282"/>
+                </a:solidFill>
+                <a:latin typeface="Arial"/>
+              </a:rPr>
+              <a:t>そして神の義を</a:t>
+            </a:r>
+          </a:p>
+        </p:txBody>
+      </p:sp>
+      <p:sp>
+        <p:nvSpPr>
+          <p:cNvPr id="5" name="TextBox 4"/>
+          <p:cNvSpPr txBox="1"/>
+          <p:nvPr/>
+        </p:nvSpPr>
+        <p:spPr>
+          <a:xfrm>
+            <a:off x="640080" y="4494276"/>
+            <a:ext cx="10911535" cy="310896"/>
+          </a:xfrm>
+          <a:prstGeom prst="rect">
+            <a:avLst/>
+          </a:prstGeom>
+          <a:noFill/>
+        </p:spPr>
+        <p:txBody>
+          <a:bodyPr wrap="square">
+            <a:spAutoFit/>
+          </a:bodyPr>
+          <a:lstStyle/>
+          <a:p>
+            <a:pPr algn="ctr"/>
+            <a:r>
+              <a:rPr sz="2000" b="0" i="0">
+                <a:solidFill>
+                  <a:srgbClr val="828282"/>
+                </a:solidFill>
+                <a:latin typeface="Arial"/>
+              </a:rPr>
+              <a:t>そうすれば、これらのもの</a:t>
+            </a:r>
+          </a:p>
+        </p:txBody>
+      </p:sp>
     </p:spTree>
   </p:cSld>
   <p:clrMapOvr>
@@ -3598,6 +3738,76 @@
           </a:p>
         </p:txBody>
       </p:sp>
+      <p:sp>
+        <p:nvSpPr>
+          <p:cNvPr id="4" name="TextBox 3"/>
+          <p:cNvSpPr txBox="1"/>
+          <p:nvPr/>
+        </p:nvSpPr>
+        <p:spPr>
+          <a:xfrm>
+            <a:off x="640080" y="4128516"/>
+            <a:ext cx="10911535" cy="310896"/>
+          </a:xfrm>
+          <a:prstGeom prst="rect">
+            <a:avLst/>
+          </a:prstGeom>
+          <a:noFill/>
+        </p:spPr>
+        <p:txBody>
+          <a:bodyPr wrap="square">
+            <a:spAutoFit/>
+          </a:bodyPr>
+          <a:lstStyle/>
+          <a:p>
+            <a:pPr algn="ctr"/>
+            <a:r>
+              <a:rPr sz="2000" b="0" i="0">
+                <a:solidFill>
+                  <a:srgbClr val="828282"/>
+                </a:solidFill>
+                <a:latin typeface="Arial"/>
+              </a:rPr>
+              <a:t>すべてあなたがたに加えられるであろう</a:t>
+            </a:r>
+          </a:p>
+        </p:txBody>
+      </p:sp>
+      <p:sp>
+        <p:nvSpPr>
+          <p:cNvPr id="5" name="TextBox 4"/>
+          <p:cNvSpPr txBox="1"/>
+          <p:nvPr/>
+        </p:nvSpPr>
+        <p:spPr>
+          <a:xfrm>
+            <a:off x="640080" y="4494276"/>
+            <a:ext cx="10911535" cy="310896"/>
+          </a:xfrm>
+          <a:prstGeom prst="rect">
+            <a:avLst/>
+          </a:prstGeom>
+          <a:noFill/>
+        </p:spPr>
+        <p:txBody>
+          <a:bodyPr wrap="square">
+            <a:spAutoFit/>
+          </a:bodyPr>
+          <a:lstStyle/>
+          <a:p>
+            <a:pPr algn="ctr"/>
+            <a:r>
+              <a:rPr sz="2000" b="0" i="0">
+                <a:solidFill>
+                  <a:srgbClr val="828282"/>
+                </a:solidFill>
+                <a:latin typeface="Arial"/>
+              </a:rPr>
+              <a:t>アレルヤ、アレルヤ</a:t>
+            </a:r>
+          </a:p>
+        </p:txBody>
+      </p:sp>
     </p:spTree>
   </p:cSld>
   <p:clrMapOvr>
@@ -3690,6 +3900,76 @@
                 <a:latin typeface="Arial"/>
               </a:rPr>
               <a:t>Buscai e achareis</a:t>
+            </a:r>
+          </a:p>
+        </p:txBody>
+      </p:sp>
+      <p:sp>
+        <p:nvSpPr>
+          <p:cNvPr id="4" name="TextBox 3"/>
+          <p:cNvSpPr txBox="1"/>
+          <p:nvPr/>
+        </p:nvSpPr>
+        <p:spPr>
+          <a:xfrm>
+            <a:off x="640080" y="4128516"/>
+            <a:ext cx="10911535" cy="310896"/>
+          </a:xfrm>
+          <a:prstGeom prst="rect">
+            <a:avLst/>
+          </a:prstGeom>
+          <a:noFill/>
+        </p:spPr>
+        <p:txBody>
+          <a:bodyPr wrap="square">
+            <a:spAutoFit/>
+          </a:bodyPr>
+          <a:lstStyle/>
+          <a:p>
+            <a:pPr algn="ctr"/>
+            <a:r>
+              <a:rPr sz="2000" b="0" i="0">
+                <a:solidFill>
+                  <a:srgbClr val="828282"/>
+                </a:solidFill>
+                <a:latin typeface="Arial"/>
+              </a:rPr>
+              <a:t>求めよ、そうすれば与えられん</a:t>
+            </a:r>
+          </a:p>
+        </p:txBody>
+      </p:sp>
+      <p:sp>
+        <p:nvSpPr>
+          <p:cNvPr id="5" name="TextBox 4"/>
+          <p:cNvSpPr txBox="1"/>
+          <p:nvPr/>
+        </p:nvSpPr>
+        <p:spPr>
+          <a:xfrm>
+            <a:off x="640080" y="4494276"/>
+            <a:ext cx="10911535" cy="310896"/>
+          </a:xfrm>
+          <a:prstGeom prst="rect">
+            <a:avLst/>
+          </a:prstGeom>
+          <a:noFill/>
+        </p:spPr>
+        <p:txBody>
+          <a:bodyPr wrap="square">
+            <a:spAutoFit/>
+          </a:bodyPr>
+          <a:lstStyle/>
+          <a:p>
+            <a:pPr algn="ctr"/>
+            <a:r>
+              <a:rPr sz="2000" b="0" i="0">
+                <a:solidFill>
+                  <a:srgbClr val="828282"/>
+                </a:solidFill>
+                <a:latin typeface="Arial"/>
+              </a:rPr>
+              <a:t>求めよ、そうすれば見出さん</a:t>
             </a:r>
           </a:p>
         </p:txBody>
